--- a/chapter1/chapter1.pptx
+++ b/chapter1/chapter1.pptx
@@ -560,7 +560,7 @@
           <a:lstStyle/>
           <a:p>
             <a:r>
-              <a:t>This clip opens Chapter 1 by answering a deceptively simple question: what counts as a dataset? By the end, the vocabulary of records and attributes should feel concrete, whether the file is a spreadsheet or a JSON document.</a:t>
+              <a:t>This part opens Chapter 1 by answering a deceptively simple question: what counts as a dataset? By the end, the vocabulary of records and attributes should feel concrete, whether the file is a spreadsheet or a JSON document.</a:t>
             </a:r>
           </a:p>
         </p:txBody>
@@ -1330,7 +1330,7 @@
           <a:lstStyle/>
           <a:p>
             <a:r>
-              <a:t>Three goals guide this clip. First, define a dataset as something curated for analysis, not merely a raw stream of events. Second, separate records from attributes so every later example has a shared language. Third, see that the same idea appears in both flat CSV tables and nested JSON.</a:t>
+              <a:t>Three goals guide this part. First, define a dataset as something curated for analysis, not merely a raw stream of events. Second, separate records from attributes so every later example has a shared language. Third, see that the same idea appears in both flat CSV tables and nested JSON.</a:t>
             </a:r>
           </a:p>
         </p:txBody>
@@ -2310,7 +2310,7 @@
           <a:lstStyle/>
           <a:p>
             <a:r>
-              <a:t>This clip covers three early questions every analyst should settle, how to match tools to the table at hand, and a minimal profiling pattern using summaries, visuals, and missingness checks.</a:t>
+              <a:t>This part covers three early questions every analyst should settle, how to match tools to the table at hand, and a minimal profiling pattern using summaries, visuals, and missingness checks.</a:t>
             </a:r>
           </a:p>
         </p:txBody>
@@ -4060,7 +4060,7 @@
           <a:lstStyle/>
           <a:p>
             <a:r>
-              <a:t>Pause for the quiz, then continue to the next clip on types of datasets—structured, unstructured, and semi-structured.</a:t>
+              <a:t>Pause for the quiz, then continue to the next part on types of datasets—structured, unstructured, and semi-structured.</a:t>
             </a:r>
           </a:p>
         </p:txBody>
@@ -4130,7 +4130,7 @@
           <a:lstStyle/>
           <a:p>
             <a:r>
-              <a:t>By the end of this clip, you should contrast the three structural types, name a typical format for each, and explain when a dataset is static versus dynamic.</a:t>
+              <a:t>By the end of this part, you should contrast the three structural types, name a typical format for each, and explain when a dataset is static versus dynamic.</a:t>
             </a:r>
           </a:p>
         </p:txBody>
@@ -7192,7 +7192,7 @@
                 </a:solidFill>
                 <a:latin typeface="Calibri"/>
               </a:rPr>
-              <a:t>This clip opens Chapter 1 by answering a deceptively simple question: what counts as a dataset?</a:t>
+              <a:t>This part opens Chapter 1 by answering a deceptively simple question: what counts as a dataset?</a:t>
             </a:r>
           </a:p>
         </p:txBody>
@@ -7331,7 +7331,7 @@
                 </a:solidFill>
                 <a:latin typeface="Calibri"/>
               </a:rPr>
-              <a:t>Complete the quiz for this clip</a:t>
+              <a:t>Complete the quiz for this part</a:t>
             </a:r>
           </a:p>
           <a:p>
@@ -7351,7 +7351,7 @@
                 </a:solidFill>
                 <a:latin typeface="Calibri"/>
               </a:rPr>
-              <a:t>Continue to the next clip on types of datasets, structured, unstructured</a:t>
+              <a:t>Continue to the next part on types of datasets, structured, unstructured</a:t>
             </a:r>
           </a:p>
         </p:txBody>
@@ -8763,7 +8763,7 @@
                 </a:solidFill>
                 <a:latin typeface="Calibri"/>
               </a:rPr>
-              <a:t>Complete the quiz for this clip</a:t>
+              <a:t>Complete the quiz for this part</a:t>
             </a:r>
           </a:p>
           <a:p>
@@ -11285,7 +11285,7 @@
                 </a:solidFill>
                 <a:latin typeface="Calibri"/>
               </a:rPr>
-              <a:t>Complete the quiz for this clip</a:t>
+              <a:t>Complete the quiz for this part</a:t>
             </a:r>
           </a:p>
           <a:p>
@@ -12894,7 +12894,7 @@
                 </a:solidFill>
                 <a:latin typeface="Calibri"/>
               </a:rPr>
-              <a:t>Complete the quiz for this clip</a:t>
+              <a:t>Complete the quiz for this part</a:t>
             </a:r>
           </a:p>
           <a:p>
@@ -14750,7 +14750,7 @@
                 </a:solidFill>
                 <a:latin typeface="Calibri"/>
               </a:rPr>
-              <a:t>Complete the quiz for this clip</a:t>
+              <a:t>Complete the quiz for this part</a:t>
             </a:r>
           </a:p>
           <a:p>
@@ -16685,7 +16685,7 @@
                 </a:solidFill>
                 <a:latin typeface="Calibri"/>
               </a:rPr>
-              <a:t>Complete the quiz for this clip</a:t>
+              <a:t>Complete the quiz for this part</a:t>
             </a:r>
           </a:p>
           <a:p>
@@ -17858,7 +17858,7 @@
                 </a:solidFill>
                 <a:latin typeface="Calibri"/>
               </a:rPr>
-              <a:t>Complete the quiz for this clip</a:t>
+              <a:t>Complete the quiz for this part</a:t>
             </a:r>
           </a:p>
           <a:p>

--- a/chapter1/chapter1.pptx
+++ b/chapter1/chapter1.pptx
@@ -7315,10 +7315,12 @@
           </a:bodyPr>
           <a:lstStyle/>
           <a:p>
-            <a:pPr>
+            <a:pPr lvl="0" marL="457200" indent="-228600">
+              <a:buFont typeface="Calibri"/>
               <a:spcAft>
                 <a:spcPts val="1000"/>
               </a:spcAft>
+              <a:buSzPct val="100000"/>
               <a:buChar char="•"/>
               <a:lnSpc>
                 <a:spcPts val="2200"/>
@@ -7335,10 +7337,12 @@
             </a:r>
           </a:p>
           <a:p>
-            <a:pPr>
+            <a:pPr lvl="0" marL="457200" indent="-228600">
+              <a:buFont typeface="Calibri"/>
               <a:spcAft>
                 <a:spcPts val="1000"/>
               </a:spcAft>
+              <a:buSzPct val="100000"/>
               <a:buChar char="•"/>
               <a:lnSpc>
                 <a:spcPts val="2200"/>
@@ -7474,10 +7478,12 @@
           </a:bodyPr>
           <a:lstStyle/>
           <a:p>
-            <a:pPr>
+            <a:pPr lvl="0" marL="457200" indent="-228600">
+              <a:buFont typeface="Calibri"/>
               <a:spcAft>
                 <a:spcPts val="1000"/>
               </a:spcAft>
+              <a:buSzPct val="100000"/>
               <a:buChar char="•"/>
               <a:lnSpc>
                 <a:spcPts val="2200"/>
@@ -7494,10 +7500,12 @@
             </a:r>
           </a:p>
           <a:p>
-            <a:pPr>
+            <a:pPr lvl="0" marL="457200" indent="-228600">
+              <a:buFont typeface="Calibri"/>
               <a:spcAft>
                 <a:spcPts val="1000"/>
               </a:spcAft>
+              <a:buSzPct val="100000"/>
               <a:buChar char="•"/>
               <a:lnSpc>
                 <a:spcPts val="2200"/>
@@ -7633,10 +7641,12 @@
           </a:bodyPr>
           <a:lstStyle/>
           <a:p>
-            <a:pPr>
+            <a:pPr lvl="0" marL="457200" indent="-228600">
+              <a:buFont typeface="Calibri"/>
               <a:spcAft>
                 <a:spcPts val="1000"/>
               </a:spcAft>
+              <a:buSzPct val="100000"/>
               <a:buChar char="•"/>
               <a:lnSpc>
                 <a:spcPts val="2200"/>
@@ -7653,10 +7663,12 @@
             </a:r>
           </a:p>
           <a:p>
-            <a:pPr>
+            <a:pPr lvl="0" marL="457200" indent="-228600">
+              <a:buFont typeface="Calibri"/>
               <a:spcAft>
                 <a:spcPts val="1000"/>
               </a:spcAft>
+              <a:buSzPct val="100000"/>
               <a:buChar char="•"/>
               <a:lnSpc>
                 <a:spcPts val="2200"/>
@@ -7673,10 +7685,12 @@
             </a:r>
           </a:p>
           <a:p>
-            <a:pPr>
+            <a:pPr lvl="0" marL="457200" indent="-228600">
+              <a:buFont typeface="Calibri"/>
               <a:spcAft>
                 <a:spcPts val="1000"/>
               </a:spcAft>
+              <a:buSzPct val="100000"/>
               <a:buChar char="•"/>
               <a:lnSpc>
                 <a:spcPts val="2200"/>
@@ -7693,10 +7707,12 @@
             </a:r>
           </a:p>
           <a:p>
-            <a:pPr>
+            <a:pPr lvl="0" marL="457200" indent="-228600">
+              <a:buFont typeface="Calibri"/>
               <a:spcAft>
                 <a:spcPts val="1000"/>
               </a:spcAft>
+              <a:buSzPct val="100000"/>
               <a:buChar char="•"/>
               <a:lnSpc>
                 <a:spcPts val="2200"/>
@@ -7832,10 +7848,12 @@
           </a:bodyPr>
           <a:lstStyle/>
           <a:p>
-            <a:pPr>
+            <a:pPr lvl="0" marL="457200" indent="-228600">
+              <a:buFont typeface="Calibri"/>
               <a:spcAft>
                 <a:spcPts val="1000"/>
               </a:spcAft>
+              <a:buSzPct val="100000"/>
               <a:buChar char="•"/>
               <a:lnSpc>
                 <a:spcPts val="2200"/>
@@ -7852,10 +7870,12 @@
             </a:r>
           </a:p>
           <a:p>
-            <a:pPr>
+            <a:pPr lvl="0" marL="457200" indent="-228600">
+              <a:buFont typeface="Calibri"/>
               <a:spcAft>
                 <a:spcPts val="1000"/>
               </a:spcAft>
+              <a:buSzPct val="100000"/>
               <a:buChar char="•"/>
               <a:lnSpc>
                 <a:spcPts val="2200"/>
@@ -7872,10 +7892,12 @@
             </a:r>
           </a:p>
           <a:p>
-            <a:pPr>
+            <a:pPr lvl="0" marL="457200" indent="-228600">
+              <a:buFont typeface="Calibri"/>
               <a:spcAft>
                 <a:spcPts val="1000"/>
               </a:spcAft>
+              <a:buSzPct val="100000"/>
               <a:buChar char="•"/>
               <a:lnSpc>
                 <a:spcPts val="2200"/>
@@ -8011,10 +8033,12 @@
           </a:bodyPr>
           <a:lstStyle/>
           <a:p>
-            <a:pPr>
+            <a:pPr lvl="0" marL="457200" indent="-228600">
+              <a:buFont typeface="Calibri"/>
               <a:spcAft>
                 <a:spcPts val="1000"/>
               </a:spcAft>
+              <a:buSzPct val="100000"/>
               <a:buChar char="•"/>
               <a:lnSpc>
                 <a:spcPts val="2200"/>
@@ -8031,10 +8055,12 @@
             </a:r>
           </a:p>
           <a:p>
-            <a:pPr>
+            <a:pPr lvl="0" marL="457200" indent="-228600">
+              <a:buFont typeface="Calibri"/>
               <a:spcAft>
                 <a:spcPts val="1000"/>
               </a:spcAft>
+              <a:buSzPct val="100000"/>
               <a:buChar char="•"/>
               <a:lnSpc>
                 <a:spcPts val="2200"/>
@@ -8051,10 +8077,12 @@
             </a:r>
           </a:p>
           <a:p>
-            <a:pPr>
+            <a:pPr lvl="0" marL="457200" indent="-228600">
+              <a:buFont typeface="Calibri"/>
               <a:spcAft>
                 <a:spcPts val="1000"/>
               </a:spcAft>
+              <a:buSzPct val="100000"/>
               <a:buChar char="•"/>
               <a:lnSpc>
                 <a:spcPts val="2200"/>
@@ -8071,10 +8099,12 @@
             </a:r>
           </a:p>
           <a:p>
-            <a:pPr>
+            <a:pPr lvl="0" marL="457200" indent="-228600">
+              <a:buFont typeface="Calibri"/>
               <a:spcAft>
                 <a:spcPts val="1000"/>
               </a:spcAft>
+              <a:buSzPct val="100000"/>
               <a:buChar char="•"/>
               <a:lnSpc>
                 <a:spcPts val="2200"/>
@@ -8210,10 +8240,12 @@
           </a:bodyPr>
           <a:lstStyle/>
           <a:p>
-            <a:pPr>
+            <a:pPr lvl="0" marL="457200" indent="-228600">
+              <a:buFont typeface="Calibri"/>
               <a:spcAft>
                 <a:spcPts val="1000"/>
               </a:spcAft>
+              <a:buSzPct val="100000"/>
               <a:buChar char="•"/>
               <a:lnSpc>
                 <a:spcPts val="2200"/>
@@ -8230,10 +8262,12 @@
             </a:r>
           </a:p>
           <a:p>
-            <a:pPr>
+            <a:pPr lvl="0" marL="457200" indent="-228600">
+              <a:buFont typeface="Calibri"/>
               <a:spcAft>
                 <a:spcPts val="1000"/>
               </a:spcAft>
+              <a:buSzPct val="100000"/>
               <a:buChar char="•"/>
               <a:lnSpc>
                 <a:spcPts val="2200"/>
@@ -8250,10 +8284,12 @@
             </a:r>
           </a:p>
           <a:p>
-            <a:pPr>
+            <a:pPr lvl="0" marL="457200" indent="-228600">
+              <a:buFont typeface="Calibri"/>
               <a:spcAft>
                 <a:spcPts val="1000"/>
               </a:spcAft>
+              <a:buSzPct val="100000"/>
               <a:buChar char="•"/>
               <a:lnSpc>
                 <a:spcPts val="2200"/>
@@ -8389,10 +8425,12 @@
           </a:bodyPr>
           <a:lstStyle/>
           <a:p>
-            <a:pPr>
+            <a:pPr lvl="0" marL="457200" indent="-228600">
+              <a:buFont typeface="Calibri"/>
               <a:spcAft>
                 <a:spcPts val="1000"/>
               </a:spcAft>
+              <a:buSzPct val="100000"/>
               <a:buChar char="•"/>
               <a:lnSpc>
                 <a:spcPts val="2200"/>
@@ -8409,10 +8447,12 @@
             </a:r>
           </a:p>
           <a:p>
-            <a:pPr>
+            <a:pPr lvl="0" marL="457200" indent="-228600">
+              <a:buFont typeface="Calibri"/>
               <a:spcAft>
                 <a:spcPts val="1000"/>
               </a:spcAft>
+              <a:buSzPct val="100000"/>
               <a:buChar char="•"/>
               <a:lnSpc>
                 <a:spcPts val="2200"/>
@@ -8429,10 +8469,12 @@
             </a:r>
           </a:p>
           <a:p>
-            <a:pPr>
+            <a:pPr lvl="0" marL="457200" indent="-228600">
+              <a:buFont typeface="Calibri"/>
               <a:spcAft>
                 <a:spcPts val="1000"/>
               </a:spcAft>
+              <a:buSzPct val="100000"/>
               <a:buChar char="•"/>
               <a:lnSpc>
                 <a:spcPts val="2200"/>
@@ -8449,10 +8491,12 @@
             </a:r>
           </a:p>
           <a:p>
-            <a:pPr>
+            <a:pPr lvl="0" marL="457200" indent="-228600">
+              <a:buFont typeface="Calibri"/>
               <a:spcAft>
                 <a:spcPts val="1000"/>
               </a:spcAft>
+              <a:buSzPct val="100000"/>
               <a:buChar char="•"/>
               <a:lnSpc>
                 <a:spcPts val="2200"/>
@@ -8588,10 +8632,12 @@
           </a:bodyPr>
           <a:lstStyle/>
           <a:p>
-            <a:pPr>
+            <a:pPr lvl="0" marL="457200" indent="-228600">
+              <a:buFont typeface="Calibri"/>
               <a:spcAft>
                 <a:spcPts val="1000"/>
               </a:spcAft>
+              <a:buSzPct val="100000"/>
               <a:buChar char="•"/>
               <a:lnSpc>
                 <a:spcPts val="2200"/>
@@ -8608,10 +8654,12 @@
             </a:r>
           </a:p>
           <a:p>
-            <a:pPr>
+            <a:pPr lvl="0" marL="457200" indent="-228600">
+              <a:buFont typeface="Calibri"/>
               <a:spcAft>
                 <a:spcPts val="1000"/>
               </a:spcAft>
+              <a:buSzPct val="100000"/>
               <a:buChar char="•"/>
               <a:lnSpc>
                 <a:spcPts val="2200"/>
@@ -8747,10 +8795,12 @@
           </a:bodyPr>
           <a:lstStyle/>
           <a:p>
-            <a:pPr>
+            <a:pPr lvl="0" marL="457200" indent="-228600">
+              <a:buFont typeface="Calibri"/>
               <a:spcAft>
                 <a:spcPts val="1000"/>
               </a:spcAft>
+              <a:buSzPct val="100000"/>
               <a:buChar char="•"/>
               <a:lnSpc>
                 <a:spcPts val="2200"/>
@@ -8767,10 +8817,12 @@
             </a:r>
           </a:p>
           <a:p>
-            <a:pPr>
+            <a:pPr lvl="0" marL="457200" indent="-228600">
+              <a:buFont typeface="Calibri"/>
               <a:spcAft>
                 <a:spcPts val="1000"/>
               </a:spcAft>
+              <a:buSzPct val="100000"/>
               <a:buChar char="•"/>
               <a:lnSpc>
                 <a:spcPts val="2200"/>
@@ -8906,10 +8958,12 @@
           </a:bodyPr>
           <a:lstStyle/>
           <a:p>
-            <a:pPr>
+            <a:pPr lvl="0" marL="457200" indent="-228600">
+              <a:buFont typeface="Calibri"/>
               <a:spcAft>
                 <a:spcPts val="1000"/>
               </a:spcAft>
+              <a:buSzPct val="100000"/>
               <a:buChar char="•"/>
               <a:lnSpc>
                 <a:spcPts val="2200"/>
@@ -8926,10 +8980,12 @@
             </a:r>
           </a:p>
           <a:p>
-            <a:pPr>
+            <a:pPr lvl="0" marL="457200" indent="-228600">
+              <a:buFont typeface="Calibri"/>
               <a:spcAft>
                 <a:spcPts val="1000"/>
               </a:spcAft>
+              <a:buSzPct val="100000"/>
               <a:buChar char="•"/>
               <a:lnSpc>
                 <a:spcPts val="2200"/>
@@ -8946,10 +9002,12 @@
             </a:r>
           </a:p>
           <a:p>
-            <a:pPr>
+            <a:pPr lvl="0" marL="457200" indent="-228600">
+              <a:buFont typeface="Calibri"/>
               <a:spcAft>
                 <a:spcPts val="1000"/>
               </a:spcAft>
+              <a:buSzPct val="100000"/>
               <a:buChar char="•"/>
               <a:lnSpc>
                 <a:spcPts val="2200"/>
@@ -9085,10 +9143,12 @@
           </a:bodyPr>
           <a:lstStyle/>
           <a:p>
-            <a:pPr>
+            <a:pPr lvl="0" marL="457200" indent="-228600">
+              <a:buFont typeface="Calibri"/>
               <a:spcAft>
                 <a:spcPts val="1000"/>
               </a:spcAft>
+              <a:buSzPct val="100000"/>
               <a:buChar char="•"/>
               <a:lnSpc>
                 <a:spcPts val="2200"/>
@@ -9105,10 +9165,12 @@
             </a:r>
           </a:p>
           <a:p>
-            <a:pPr>
+            <a:pPr lvl="0" marL="457200" indent="-228600">
+              <a:buFont typeface="Calibri"/>
               <a:spcAft>
                 <a:spcPts val="1000"/>
               </a:spcAft>
+              <a:buSzPct val="100000"/>
               <a:buChar char="•"/>
               <a:lnSpc>
                 <a:spcPts val="2200"/>
@@ -9125,10 +9187,12 @@
             </a:r>
           </a:p>
           <a:p>
-            <a:pPr>
+            <a:pPr lvl="0" marL="457200" indent="-228600">
+              <a:buFont typeface="Calibri"/>
               <a:spcAft>
                 <a:spcPts val="1000"/>
               </a:spcAft>
+              <a:buSzPct val="100000"/>
               <a:buChar char="•"/>
               <a:lnSpc>
                 <a:spcPts val="2200"/>
@@ -9264,10 +9328,12 @@
           </a:bodyPr>
           <a:lstStyle/>
           <a:p>
-            <a:pPr>
+            <a:pPr lvl="0" marL="457200" indent="-228600">
+              <a:buFont typeface="Calibri"/>
               <a:spcAft>
                 <a:spcPts val="1000"/>
               </a:spcAft>
+              <a:buSzPct val="100000"/>
               <a:buChar char="•"/>
               <a:lnSpc>
                 <a:spcPts val="2200"/>
@@ -9284,10 +9350,12 @@
             </a:r>
           </a:p>
           <a:p>
-            <a:pPr>
+            <a:pPr lvl="0" marL="457200" indent="-228600">
+              <a:buFont typeface="Calibri"/>
               <a:spcAft>
                 <a:spcPts val="1000"/>
               </a:spcAft>
+              <a:buSzPct val="100000"/>
               <a:buChar char="•"/>
               <a:lnSpc>
                 <a:spcPts val="2200"/>
@@ -9304,10 +9372,12 @@
             </a:r>
           </a:p>
           <a:p>
-            <a:pPr>
+            <a:pPr lvl="0" marL="457200" indent="-228600">
+              <a:buFont typeface="Calibri"/>
               <a:spcAft>
                 <a:spcPts val="1000"/>
               </a:spcAft>
+              <a:buSzPct val="100000"/>
               <a:buChar char="•"/>
               <a:lnSpc>
                 <a:spcPts val="2200"/>
@@ -9443,10 +9513,12 @@
           </a:bodyPr>
           <a:lstStyle/>
           <a:p>
-            <a:pPr>
+            <a:pPr lvl="0" marL="457200" indent="-228600">
+              <a:buFont typeface="Calibri"/>
               <a:spcAft>
                 <a:spcPts val="1000"/>
               </a:spcAft>
+              <a:buSzPct val="100000"/>
               <a:buChar char="•"/>
               <a:lnSpc>
                 <a:spcPts val="2200"/>
@@ -9463,10 +9535,12 @@
             </a:r>
           </a:p>
           <a:p>
-            <a:pPr>
+            <a:pPr lvl="0" marL="457200" indent="-228600">
+              <a:buFont typeface="Calibri"/>
               <a:spcAft>
                 <a:spcPts val="1000"/>
               </a:spcAft>
+              <a:buSzPct val="100000"/>
               <a:buChar char="•"/>
               <a:lnSpc>
                 <a:spcPts val="2200"/>
@@ -9483,10 +9557,12 @@
             </a:r>
           </a:p>
           <a:p>
-            <a:pPr>
+            <a:pPr lvl="0" marL="457200" indent="-228600">
+              <a:buFont typeface="Calibri"/>
               <a:spcAft>
                 <a:spcPts val="1000"/>
               </a:spcAft>
+              <a:buSzPct val="100000"/>
               <a:buChar char="•"/>
               <a:lnSpc>
                 <a:spcPts val="2200"/>
@@ -9503,10 +9579,12 @@
             </a:r>
           </a:p>
           <a:p>
-            <a:pPr>
+            <a:pPr lvl="0" marL="457200" indent="-228600">
+              <a:buFont typeface="Calibri"/>
               <a:spcAft>
                 <a:spcPts val="1000"/>
               </a:spcAft>
+              <a:buSzPct val="100000"/>
               <a:buChar char="•"/>
               <a:lnSpc>
                 <a:spcPts val="2200"/>
@@ -9523,10 +9601,12 @@
             </a:r>
           </a:p>
           <a:p>
-            <a:pPr>
+            <a:pPr lvl="0" marL="457200" indent="-228600">
+              <a:buFont typeface="Calibri"/>
               <a:spcAft>
                 <a:spcPts val="1000"/>
               </a:spcAft>
+              <a:buSzPct val="100000"/>
               <a:buChar char="•"/>
               <a:lnSpc>
                 <a:spcPts val="2200"/>
@@ -9662,10 +9742,12 @@
           </a:bodyPr>
           <a:lstStyle/>
           <a:p>
-            <a:pPr>
+            <a:pPr lvl="0" marL="457200" indent="-228600">
+              <a:buFont typeface="Calibri"/>
               <a:spcAft>
                 <a:spcPts val="1000"/>
               </a:spcAft>
+              <a:buSzPct val="100000"/>
               <a:buChar char="•"/>
               <a:lnSpc>
                 <a:spcPts val="2200"/>
@@ -9682,10 +9764,12 @@
             </a:r>
           </a:p>
           <a:p>
-            <a:pPr>
+            <a:pPr lvl="0" marL="457200" indent="-228600">
+              <a:buFont typeface="Calibri"/>
               <a:spcAft>
                 <a:spcPts val="1000"/>
               </a:spcAft>
+              <a:buSzPct val="100000"/>
               <a:buChar char="•"/>
               <a:lnSpc>
                 <a:spcPts val="2200"/>
@@ -9702,10 +9786,12 @@
             </a:r>
           </a:p>
           <a:p>
-            <a:pPr>
+            <a:pPr lvl="0" marL="457200" indent="-228600">
+              <a:buFont typeface="Calibri"/>
               <a:spcAft>
                 <a:spcPts val="1000"/>
               </a:spcAft>
+              <a:buSzPct val="100000"/>
               <a:buChar char="•"/>
               <a:lnSpc>
                 <a:spcPts val="2200"/>
@@ -9722,10 +9808,12 @@
             </a:r>
           </a:p>
           <a:p>
-            <a:pPr>
+            <a:pPr lvl="0" marL="457200" indent="-228600">
+              <a:buFont typeface="Calibri"/>
               <a:spcAft>
                 <a:spcPts val="1000"/>
               </a:spcAft>
+              <a:buSzPct val="100000"/>
               <a:buChar char="•"/>
               <a:lnSpc>
                 <a:spcPts val="2200"/>
@@ -9742,10 +9830,12 @@
             </a:r>
           </a:p>
           <a:p>
-            <a:pPr>
+            <a:pPr lvl="0" marL="457200" indent="-228600">
+              <a:buFont typeface="Calibri"/>
               <a:spcAft>
                 <a:spcPts val="1000"/>
               </a:spcAft>
+              <a:buSzPct val="100000"/>
               <a:buChar char="•"/>
               <a:lnSpc>
                 <a:spcPts val="2200"/>
@@ -10325,10 +10415,12 @@
           </a:bodyPr>
           <a:lstStyle/>
           <a:p>
-            <a:pPr>
+            <a:pPr lvl="0" marL="457200" indent="-228600">
+              <a:buFont typeface="Calibri"/>
               <a:spcAft>
                 <a:spcPts val="1000"/>
               </a:spcAft>
+              <a:buSzPct val="100000"/>
               <a:buChar char="•"/>
               <a:lnSpc>
                 <a:spcPts val="2200"/>
@@ -10345,10 +10437,12 @@
             </a:r>
           </a:p>
           <a:p>
-            <a:pPr>
+            <a:pPr lvl="0" marL="457200" indent="-228600">
+              <a:buFont typeface="Calibri"/>
               <a:spcAft>
                 <a:spcPts val="1000"/>
               </a:spcAft>
+              <a:buSzPct val="100000"/>
               <a:buChar char="•"/>
               <a:lnSpc>
                 <a:spcPts val="2200"/>
@@ -10365,10 +10459,12 @@
             </a:r>
           </a:p>
           <a:p>
-            <a:pPr>
+            <a:pPr lvl="0" marL="457200" indent="-228600">
+              <a:buFont typeface="Calibri"/>
               <a:spcAft>
                 <a:spcPts val="1000"/>
               </a:spcAft>
+              <a:buSzPct val="100000"/>
               <a:buChar char="•"/>
               <a:lnSpc>
                 <a:spcPts val="2200"/>
@@ -10385,10 +10481,12 @@
             </a:r>
           </a:p>
           <a:p>
-            <a:pPr>
+            <a:pPr lvl="0" marL="457200" indent="-228600">
+              <a:buFont typeface="Calibri"/>
               <a:spcAft>
                 <a:spcPts val="1000"/>
               </a:spcAft>
+              <a:buSzPct val="100000"/>
               <a:buChar char="•"/>
               <a:lnSpc>
                 <a:spcPts val="2200"/>
@@ -10405,10 +10503,12 @@
             </a:r>
           </a:p>
           <a:p>
-            <a:pPr>
+            <a:pPr lvl="0" marL="457200" indent="-228600">
+              <a:buFont typeface="Calibri"/>
               <a:spcAft>
                 <a:spcPts val="1000"/>
               </a:spcAft>
+              <a:buSzPct val="100000"/>
               <a:buChar char="•"/>
               <a:lnSpc>
                 <a:spcPts val="2200"/>
@@ -10931,10 +11031,12 @@
           </a:bodyPr>
           <a:lstStyle/>
           <a:p>
-            <a:pPr>
+            <a:pPr lvl="0" marL="457200" indent="-228600">
+              <a:buFont typeface="Calibri"/>
               <a:spcAft>
                 <a:spcPts val="1000"/>
               </a:spcAft>
+              <a:buSzPct val="100000"/>
               <a:buChar char="•"/>
               <a:lnSpc>
                 <a:spcPts val="2200"/>
@@ -10951,10 +11053,12 @@
             </a:r>
           </a:p>
           <a:p>
-            <a:pPr>
+            <a:pPr lvl="0" marL="457200" indent="-228600">
+              <a:buFont typeface="Calibri"/>
               <a:spcAft>
                 <a:spcPts val="1000"/>
               </a:spcAft>
+              <a:buSzPct val="100000"/>
               <a:buChar char="•"/>
               <a:lnSpc>
                 <a:spcPts val="2200"/>
@@ -10971,10 +11075,12 @@
             </a:r>
           </a:p>
           <a:p>
-            <a:pPr>
+            <a:pPr lvl="0" marL="457200" indent="-228600">
+              <a:buFont typeface="Calibri"/>
               <a:spcAft>
                 <a:spcPts val="1000"/>
               </a:spcAft>
+              <a:buSzPct val="100000"/>
               <a:buChar char="•"/>
               <a:lnSpc>
                 <a:spcPts val="2200"/>
@@ -11110,10 +11216,12 @@
           </a:bodyPr>
           <a:lstStyle/>
           <a:p>
-            <a:pPr>
+            <a:pPr lvl="0" marL="457200" indent="-228600">
+              <a:buFont typeface="Calibri"/>
               <a:spcAft>
                 <a:spcPts val="1000"/>
               </a:spcAft>
+              <a:buSzPct val="100000"/>
               <a:buChar char="•"/>
               <a:lnSpc>
                 <a:spcPts val="2200"/>
@@ -11130,10 +11238,12 @@
             </a:r>
           </a:p>
           <a:p>
-            <a:pPr>
+            <a:pPr lvl="0" marL="457200" indent="-228600">
+              <a:buFont typeface="Calibri"/>
               <a:spcAft>
                 <a:spcPts val="1000"/>
               </a:spcAft>
+              <a:buSzPct val="100000"/>
               <a:buChar char="•"/>
               <a:lnSpc>
                 <a:spcPts val="2200"/>
@@ -11269,10 +11379,12 @@
           </a:bodyPr>
           <a:lstStyle/>
           <a:p>
-            <a:pPr>
+            <a:pPr lvl="0" marL="457200" indent="-228600">
+              <a:buFont typeface="Calibri"/>
               <a:spcAft>
                 <a:spcPts val="1000"/>
               </a:spcAft>
+              <a:buSzPct val="100000"/>
               <a:buChar char="•"/>
               <a:lnSpc>
                 <a:spcPts val="2200"/>
@@ -11289,10 +11401,12 @@
             </a:r>
           </a:p>
           <a:p>
-            <a:pPr>
+            <a:pPr lvl="0" marL="457200" indent="-228600">
+              <a:buFont typeface="Calibri"/>
               <a:spcAft>
                 <a:spcPts val="1000"/>
               </a:spcAft>
+              <a:buSzPct val="100000"/>
               <a:buChar char="•"/>
               <a:lnSpc>
                 <a:spcPts val="2200"/>
@@ -11428,10 +11542,12 @@
           </a:bodyPr>
           <a:lstStyle/>
           <a:p>
-            <a:pPr>
+            <a:pPr lvl="0" marL="457200" indent="-228600">
+              <a:buFont typeface="Calibri"/>
               <a:spcAft>
                 <a:spcPts val="1000"/>
               </a:spcAft>
+              <a:buSzPct val="100000"/>
               <a:buChar char="•"/>
               <a:lnSpc>
                 <a:spcPts val="2200"/>
@@ -11567,10 +11683,12 @@
           </a:bodyPr>
           <a:lstStyle/>
           <a:p>
-            <a:pPr>
+            <a:pPr lvl="0" marL="457200" indent="-228600">
+              <a:buFont typeface="Calibri"/>
               <a:spcAft>
                 <a:spcPts val="1000"/>
               </a:spcAft>
+              <a:buSzPct val="100000"/>
               <a:buChar char="•"/>
               <a:lnSpc>
                 <a:spcPts val="2200"/>
@@ -11587,10 +11705,12 @@
             </a:r>
           </a:p>
           <a:p>
-            <a:pPr>
+            <a:pPr lvl="0" marL="457200" indent="-228600">
+              <a:buFont typeface="Calibri"/>
               <a:spcAft>
                 <a:spcPts val="1000"/>
               </a:spcAft>
+              <a:buSzPct val="100000"/>
               <a:buChar char="•"/>
               <a:lnSpc>
                 <a:spcPts val="2200"/>
@@ -11607,10 +11727,12 @@
             </a:r>
           </a:p>
           <a:p>
-            <a:pPr>
+            <a:pPr lvl="0" marL="457200" indent="-228600">
+              <a:buFont typeface="Calibri"/>
               <a:spcAft>
                 <a:spcPts val="1000"/>
               </a:spcAft>
+              <a:buSzPct val="100000"/>
               <a:buChar char="•"/>
               <a:lnSpc>
                 <a:spcPts val="2200"/>
@@ -11746,10 +11868,12 @@
           </a:bodyPr>
           <a:lstStyle/>
           <a:p>
-            <a:pPr>
+            <a:pPr lvl="0" marL="457200" indent="-228600">
+              <a:buFont typeface="Calibri"/>
               <a:spcAft>
                 <a:spcPts val="1000"/>
               </a:spcAft>
+              <a:buSzPct val="100000"/>
               <a:buChar char="•"/>
               <a:lnSpc>
                 <a:spcPts val="2200"/>
@@ -11766,10 +11890,12 @@
             </a:r>
           </a:p>
           <a:p>
-            <a:pPr>
+            <a:pPr lvl="0" marL="457200" indent="-228600">
+              <a:buFont typeface="Calibri"/>
               <a:spcAft>
                 <a:spcPts val="1000"/>
               </a:spcAft>
+              <a:buSzPct val="100000"/>
               <a:buChar char="•"/>
               <a:lnSpc>
                 <a:spcPts val="2200"/>
@@ -11786,10 +11912,12 @@
             </a:r>
           </a:p>
           <a:p>
-            <a:pPr>
+            <a:pPr lvl="0" marL="457200" indent="-228600">
+              <a:buFont typeface="Calibri"/>
               <a:spcAft>
                 <a:spcPts val="1000"/>
               </a:spcAft>
+              <a:buSzPct val="100000"/>
               <a:buChar char="•"/>
               <a:lnSpc>
                 <a:spcPts val="2200"/>
@@ -11925,10 +12053,12 @@
           </a:bodyPr>
           <a:lstStyle/>
           <a:p>
-            <a:pPr>
+            <a:pPr lvl="0" marL="457200" indent="-228600">
+              <a:buFont typeface="Calibri"/>
               <a:spcAft>
                 <a:spcPts val="1000"/>
               </a:spcAft>
+              <a:buSzPct val="100000"/>
               <a:buChar char="•"/>
               <a:lnSpc>
                 <a:spcPts val="2200"/>
@@ -11945,10 +12075,12 @@
             </a:r>
           </a:p>
           <a:p>
-            <a:pPr>
+            <a:pPr lvl="0" marL="457200" indent="-228600">
+              <a:buFont typeface="Calibri"/>
               <a:spcAft>
                 <a:spcPts val="1000"/>
               </a:spcAft>
+              <a:buSzPct val="100000"/>
               <a:buChar char="•"/>
               <a:lnSpc>
                 <a:spcPts val="2200"/>
@@ -11965,10 +12097,12 @@
             </a:r>
           </a:p>
           <a:p>
-            <a:pPr>
+            <a:pPr lvl="0" marL="457200" indent="-228600">
+              <a:buFont typeface="Calibri"/>
               <a:spcAft>
                 <a:spcPts val="1000"/>
               </a:spcAft>
+              <a:buSzPct val="100000"/>
               <a:buChar char="•"/>
               <a:lnSpc>
                 <a:spcPts val="2200"/>
@@ -11985,10 +12119,12 @@
             </a:r>
           </a:p>
           <a:p>
-            <a:pPr>
+            <a:pPr lvl="0" marL="457200" indent="-228600">
+              <a:buFont typeface="Calibri"/>
               <a:spcAft>
                 <a:spcPts val="1000"/>
               </a:spcAft>
+              <a:buSzPct val="100000"/>
               <a:buChar char="•"/>
               <a:lnSpc>
                 <a:spcPts val="2200"/>
@@ -12005,10 +12141,12 @@
             </a:r>
           </a:p>
           <a:p>
-            <a:pPr>
+            <a:pPr lvl="0" marL="457200" indent="-228600">
+              <a:buFont typeface="Calibri"/>
               <a:spcAft>
                 <a:spcPts val="1000"/>
               </a:spcAft>
+              <a:buSzPct val="100000"/>
               <a:buChar char="•"/>
               <a:lnSpc>
                 <a:spcPts val="2200"/>
@@ -12341,10 +12479,12 @@
           </a:bodyPr>
           <a:lstStyle/>
           <a:p>
-            <a:pPr>
+            <a:pPr lvl="0" marL="457200" indent="-228600">
+              <a:buFont typeface="Calibri"/>
               <a:spcAft>
                 <a:spcPts val="1000"/>
               </a:spcAft>
+              <a:buSzPct val="100000"/>
               <a:buChar char="•"/>
               <a:lnSpc>
                 <a:spcPts val="2200"/>
@@ -12361,10 +12501,12 @@
             </a:r>
           </a:p>
           <a:p>
-            <a:pPr>
+            <a:pPr lvl="0" marL="457200" indent="-228600">
+              <a:buFont typeface="Calibri"/>
               <a:spcAft>
                 <a:spcPts val="1000"/>
               </a:spcAft>
+              <a:buSzPct val="100000"/>
               <a:buChar char="•"/>
               <a:lnSpc>
                 <a:spcPts val="2200"/>
@@ -12381,10 +12523,12 @@
             </a:r>
           </a:p>
           <a:p>
-            <a:pPr>
+            <a:pPr lvl="0" marL="457200" indent="-228600">
+              <a:buFont typeface="Calibri"/>
               <a:spcAft>
                 <a:spcPts val="1000"/>
               </a:spcAft>
+              <a:buSzPct val="100000"/>
               <a:buChar char="•"/>
               <a:lnSpc>
                 <a:spcPts val="2200"/>
@@ -12520,10 +12664,12 @@
           </a:bodyPr>
           <a:lstStyle/>
           <a:p>
-            <a:pPr>
+            <a:pPr lvl="0" marL="457200" indent="-228600">
+              <a:buFont typeface="Calibri"/>
               <a:spcAft>
                 <a:spcPts val="1000"/>
               </a:spcAft>
+              <a:buSzPct val="100000"/>
               <a:buChar char="•"/>
               <a:lnSpc>
                 <a:spcPts val="2200"/>
@@ -12540,10 +12686,12 @@
             </a:r>
           </a:p>
           <a:p>
-            <a:pPr>
+            <a:pPr lvl="0" marL="457200" indent="-228600">
+              <a:buFont typeface="Calibri"/>
               <a:spcAft>
                 <a:spcPts val="1000"/>
               </a:spcAft>
+              <a:buSzPct val="100000"/>
               <a:buChar char="•"/>
               <a:lnSpc>
                 <a:spcPts val="2200"/>
@@ -12560,10 +12708,12 @@
             </a:r>
           </a:p>
           <a:p>
-            <a:pPr>
+            <a:pPr lvl="0" marL="457200" indent="-228600">
+              <a:buFont typeface="Calibri"/>
               <a:spcAft>
                 <a:spcPts val="1000"/>
               </a:spcAft>
+              <a:buSzPct val="100000"/>
               <a:buChar char="•"/>
               <a:lnSpc>
                 <a:spcPts val="2200"/>
@@ -12580,10 +12730,12 @@
             </a:r>
           </a:p>
           <a:p>
-            <a:pPr>
+            <a:pPr lvl="0" marL="457200" indent="-228600">
+              <a:buFont typeface="Calibri"/>
               <a:spcAft>
                 <a:spcPts val="1000"/>
               </a:spcAft>
+              <a:buSzPct val="100000"/>
               <a:buChar char="•"/>
               <a:lnSpc>
                 <a:spcPts val="2200"/>
@@ -12719,10 +12871,12 @@
           </a:bodyPr>
           <a:lstStyle/>
           <a:p>
-            <a:pPr>
+            <a:pPr lvl="0" marL="457200" indent="-228600">
+              <a:buFont typeface="Calibri"/>
               <a:spcAft>
                 <a:spcPts val="1000"/>
               </a:spcAft>
+              <a:buSzPct val="100000"/>
               <a:buChar char="•"/>
               <a:lnSpc>
                 <a:spcPts val="2200"/>
@@ -12739,10 +12893,12 @@
             </a:r>
           </a:p>
           <a:p>
-            <a:pPr>
+            <a:pPr lvl="0" marL="457200" indent="-228600">
+              <a:buFont typeface="Calibri"/>
               <a:spcAft>
                 <a:spcPts val="1000"/>
               </a:spcAft>
+              <a:buSzPct val="100000"/>
               <a:buChar char="•"/>
               <a:lnSpc>
                 <a:spcPts val="2200"/>
@@ -12878,10 +13034,12 @@
           </a:bodyPr>
           <a:lstStyle/>
           <a:p>
-            <a:pPr>
+            <a:pPr lvl="0" marL="457200" indent="-228600">
+              <a:buFont typeface="Calibri"/>
               <a:spcAft>
                 <a:spcPts val="1000"/>
               </a:spcAft>
+              <a:buSzPct val="100000"/>
               <a:buChar char="•"/>
               <a:lnSpc>
                 <a:spcPts val="2200"/>
@@ -12898,10 +13056,12 @@
             </a:r>
           </a:p>
           <a:p>
-            <a:pPr>
+            <a:pPr lvl="0" marL="457200" indent="-228600">
+              <a:buFont typeface="Calibri"/>
               <a:spcAft>
                 <a:spcPts val="1000"/>
               </a:spcAft>
+              <a:buSzPct val="100000"/>
               <a:buChar char="•"/>
               <a:lnSpc>
                 <a:spcPts val="2200"/>
@@ -13037,10 +13197,12 @@
           </a:bodyPr>
           <a:lstStyle/>
           <a:p>
-            <a:pPr>
+            <a:pPr lvl="0" marL="457200" indent="-228600">
+              <a:buFont typeface="Calibri"/>
               <a:spcAft>
                 <a:spcPts val="1000"/>
               </a:spcAft>
+              <a:buSzPct val="100000"/>
               <a:buChar char="•"/>
               <a:lnSpc>
                 <a:spcPts val="2200"/>
@@ -13176,10 +13338,12 @@
           </a:bodyPr>
           <a:lstStyle/>
           <a:p>
-            <a:pPr>
+            <a:pPr lvl="0" marL="457200" indent="-228600">
+              <a:buFont typeface="Calibri"/>
               <a:spcAft>
                 <a:spcPts val="1000"/>
               </a:spcAft>
+              <a:buSzPct val="100000"/>
               <a:buChar char="•"/>
               <a:lnSpc>
                 <a:spcPts val="2200"/>
@@ -13196,10 +13360,12 @@
             </a:r>
           </a:p>
           <a:p>
-            <a:pPr>
+            <a:pPr lvl="0" marL="457200" indent="-228600">
+              <a:buFont typeface="Calibri"/>
               <a:spcAft>
                 <a:spcPts val="1000"/>
               </a:spcAft>
+              <a:buSzPct val="100000"/>
               <a:buChar char="•"/>
               <a:lnSpc>
                 <a:spcPts val="2200"/>
@@ -13335,10 +13501,12 @@
           </a:bodyPr>
           <a:lstStyle/>
           <a:p>
-            <a:pPr>
+            <a:pPr lvl="0" marL="457200" indent="-228600">
+              <a:buFont typeface="Calibri"/>
               <a:spcAft>
                 <a:spcPts val="1000"/>
               </a:spcAft>
+              <a:buSzPct val="100000"/>
               <a:buChar char="•"/>
               <a:lnSpc>
                 <a:spcPts val="2200"/>
@@ -13355,10 +13523,12 @@
             </a:r>
           </a:p>
           <a:p>
-            <a:pPr>
+            <a:pPr lvl="0" marL="457200" indent="-228600">
+              <a:buFont typeface="Calibri"/>
               <a:spcAft>
                 <a:spcPts val="1000"/>
               </a:spcAft>
+              <a:buSzPct val="100000"/>
               <a:buChar char="•"/>
               <a:lnSpc>
                 <a:spcPts val="2200"/>
@@ -13494,10 +13664,12 @@
           </a:bodyPr>
           <a:lstStyle/>
           <a:p>
-            <a:pPr>
+            <a:pPr lvl="0" marL="457200" indent="-228600">
+              <a:buFont typeface="Calibri"/>
               <a:spcAft>
                 <a:spcPts val="1000"/>
               </a:spcAft>
+              <a:buSzPct val="100000"/>
               <a:buChar char="•"/>
               <a:lnSpc>
                 <a:spcPts val="2200"/>
@@ -13514,10 +13686,12 @@
             </a:r>
           </a:p>
           <a:p>
-            <a:pPr>
+            <a:pPr lvl="0" marL="457200" indent="-228600">
+              <a:buFont typeface="Calibri"/>
               <a:spcAft>
                 <a:spcPts val="1000"/>
               </a:spcAft>
+              <a:buSzPct val="100000"/>
               <a:buChar char="•"/>
               <a:lnSpc>
                 <a:spcPts val="2200"/>
@@ -13534,10 +13708,12 @@
             </a:r>
           </a:p>
           <a:p>
-            <a:pPr>
+            <a:pPr lvl="0" marL="457200" indent="-228600">
+              <a:buFont typeface="Calibri"/>
               <a:spcAft>
                 <a:spcPts val="1000"/>
               </a:spcAft>
+              <a:buSzPct val="100000"/>
               <a:buChar char="•"/>
               <a:lnSpc>
                 <a:spcPts val="2200"/>
@@ -13673,10 +13849,12 @@
           </a:bodyPr>
           <a:lstStyle/>
           <a:p>
-            <a:pPr>
+            <a:pPr lvl="0" marL="457200" indent="-228600">
+              <a:buFont typeface="Calibri"/>
               <a:spcAft>
                 <a:spcPts val="1000"/>
               </a:spcAft>
+              <a:buSzPct val="100000"/>
               <a:buChar char="•"/>
               <a:lnSpc>
                 <a:spcPts val="2200"/>
@@ -13693,10 +13871,12 @@
             </a:r>
           </a:p>
           <a:p>
-            <a:pPr>
+            <a:pPr lvl="0" marL="457200" indent="-228600">
+              <a:buFont typeface="Calibri"/>
               <a:spcAft>
                 <a:spcPts val="1000"/>
               </a:spcAft>
+              <a:buSzPct val="100000"/>
               <a:buChar char="•"/>
               <a:lnSpc>
                 <a:spcPts val="2200"/>
@@ -13713,10 +13893,12 @@
             </a:r>
           </a:p>
           <a:p>
-            <a:pPr>
+            <a:pPr lvl="0" marL="457200" indent="-228600">
+              <a:buFont typeface="Calibri"/>
               <a:spcAft>
                 <a:spcPts val="1000"/>
               </a:spcAft>
+              <a:buSzPct val="100000"/>
               <a:buChar char="•"/>
               <a:lnSpc>
                 <a:spcPts val="2200"/>
@@ -13733,10 +13915,12 @@
             </a:r>
           </a:p>
           <a:p>
-            <a:pPr>
+            <a:pPr lvl="0" marL="457200" indent="-228600">
+              <a:buFont typeface="Calibri"/>
               <a:spcAft>
                 <a:spcPts val="1000"/>
               </a:spcAft>
+              <a:buSzPct val="100000"/>
               <a:buChar char="•"/>
               <a:lnSpc>
                 <a:spcPts val="2200"/>
@@ -13753,10 +13937,12 @@
             </a:r>
           </a:p>
           <a:p>
-            <a:pPr>
+            <a:pPr lvl="0" marL="457200" indent="-228600">
+              <a:buFont typeface="Calibri"/>
               <a:spcAft>
                 <a:spcPts val="1000"/>
               </a:spcAft>
+              <a:buSzPct val="100000"/>
               <a:buChar char="•"/>
               <a:lnSpc>
                 <a:spcPts val="2200"/>
@@ -13892,10 +14078,12 @@
           </a:bodyPr>
           <a:lstStyle/>
           <a:p>
-            <a:pPr>
+            <a:pPr lvl="0" marL="457200" indent="-228600">
+              <a:buFont typeface="Calibri"/>
               <a:spcAft>
                 <a:spcPts val="1000"/>
               </a:spcAft>
+              <a:buSzPct val="100000"/>
               <a:buChar char="•"/>
               <a:lnSpc>
                 <a:spcPts val="2200"/>
@@ -13912,10 +14100,12 @@
             </a:r>
           </a:p>
           <a:p>
-            <a:pPr>
+            <a:pPr lvl="0" marL="457200" indent="-228600">
+              <a:buFont typeface="Calibri"/>
               <a:spcAft>
                 <a:spcPts val="1000"/>
               </a:spcAft>
+              <a:buSzPct val="100000"/>
               <a:buChar char="•"/>
               <a:lnSpc>
                 <a:spcPts val="2200"/>
@@ -13932,10 +14122,12 @@
             </a:r>
           </a:p>
           <a:p>
-            <a:pPr>
+            <a:pPr lvl="0" marL="457200" indent="-228600">
+              <a:buFont typeface="Calibri"/>
               <a:spcAft>
                 <a:spcPts val="1000"/>
               </a:spcAft>
+              <a:buSzPct val="100000"/>
               <a:buChar char="•"/>
               <a:lnSpc>
                 <a:spcPts val="2200"/>
@@ -13952,10 +14144,12 @@
             </a:r>
           </a:p>
           <a:p>
-            <a:pPr>
+            <a:pPr lvl="0" marL="457200" indent="-228600">
+              <a:buFont typeface="Calibri"/>
               <a:spcAft>
                 <a:spcPts val="1000"/>
               </a:spcAft>
+              <a:buSzPct val="100000"/>
               <a:buChar char="•"/>
               <a:lnSpc>
                 <a:spcPts val="2200"/>
@@ -13972,10 +14166,12 @@
             </a:r>
           </a:p>
           <a:p>
-            <a:pPr>
+            <a:pPr lvl="0" marL="457200" indent="-228600">
+              <a:buFont typeface="Calibri"/>
               <a:spcAft>
                 <a:spcPts val="1000"/>
               </a:spcAft>
+              <a:buSzPct val="100000"/>
               <a:buChar char="•"/>
               <a:lnSpc>
                 <a:spcPts val="2200"/>
@@ -14555,10 +14751,12 @@
           </a:bodyPr>
           <a:lstStyle/>
           <a:p>
-            <a:pPr>
+            <a:pPr lvl="0" marL="457200" indent="-228600">
+              <a:buFont typeface="Calibri"/>
               <a:spcAft>
                 <a:spcPts val="1000"/>
               </a:spcAft>
+              <a:buSzPct val="100000"/>
               <a:buChar char="•"/>
               <a:lnSpc>
                 <a:spcPts val="2200"/>
@@ -14575,10 +14773,12 @@
             </a:r>
           </a:p>
           <a:p>
-            <a:pPr>
+            <a:pPr lvl="0" marL="457200" indent="-228600">
+              <a:buFont typeface="Calibri"/>
               <a:spcAft>
                 <a:spcPts val="1000"/>
               </a:spcAft>
+              <a:buSzPct val="100000"/>
               <a:buChar char="•"/>
               <a:lnSpc>
                 <a:spcPts val="2200"/>
@@ -14595,10 +14795,12 @@
             </a:r>
           </a:p>
           <a:p>
-            <a:pPr>
+            <a:pPr lvl="0" marL="457200" indent="-228600">
+              <a:buFont typeface="Calibri"/>
               <a:spcAft>
                 <a:spcPts val="1000"/>
               </a:spcAft>
+              <a:buSzPct val="100000"/>
               <a:buChar char="•"/>
               <a:lnSpc>
                 <a:spcPts val="2200"/>
@@ -14734,10 +14936,12 @@
           </a:bodyPr>
           <a:lstStyle/>
           <a:p>
-            <a:pPr>
+            <a:pPr lvl="0" marL="457200" indent="-228600">
+              <a:buFont typeface="Calibri"/>
               <a:spcAft>
                 <a:spcPts val="1000"/>
               </a:spcAft>
+              <a:buSzPct val="100000"/>
               <a:buChar char="•"/>
               <a:lnSpc>
                 <a:spcPts val="2200"/>
@@ -14754,10 +14958,12 @@
             </a:r>
           </a:p>
           <a:p>
-            <a:pPr>
+            <a:pPr lvl="0" marL="457200" indent="-228600">
+              <a:buFont typeface="Calibri"/>
               <a:spcAft>
                 <a:spcPts val="1000"/>
               </a:spcAft>
+              <a:buSzPct val="100000"/>
               <a:buChar char="•"/>
               <a:lnSpc>
                 <a:spcPts val="2200"/>
@@ -14893,10 +15099,12 @@
           </a:bodyPr>
           <a:lstStyle/>
           <a:p>
-            <a:pPr>
+            <a:pPr lvl="0" marL="457200" indent="-228600">
+              <a:buFont typeface="Calibri"/>
               <a:spcAft>
                 <a:spcPts val="1000"/>
               </a:spcAft>
+              <a:buSzPct val="100000"/>
               <a:buChar char="•"/>
               <a:lnSpc>
                 <a:spcPts val="2200"/>
@@ -14913,10 +15121,12 @@
             </a:r>
           </a:p>
           <a:p>
-            <a:pPr>
+            <a:pPr lvl="0" marL="457200" indent="-228600">
+              <a:buFont typeface="Calibri"/>
               <a:spcAft>
                 <a:spcPts val="1000"/>
               </a:spcAft>
+              <a:buSzPct val="100000"/>
               <a:buChar char="•"/>
               <a:lnSpc>
                 <a:spcPts val="2200"/>
@@ -15052,10 +15262,12 @@
           </a:bodyPr>
           <a:lstStyle/>
           <a:p>
-            <a:pPr>
+            <a:pPr lvl="0" marL="457200" indent="-228600">
+              <a:buFont typeface="Calibri"/>
               <a:spcAft>
                 <a:spcPts val="1000"/>
               </a:spcAft>
+              <a:buSzPct val="100000"/>
               <a:buChar char="•"/>
               <a:lnSpc>
                 <a:spcPts val="2200"/>
@@ -15072,10 +15284,12 @@
             </a:r>
           </a:p>
           <a:p>
-            <a:pPr>
+            <a:pPr lvl="0" marL="457200" indent="-228600">
+              <a:buFont typeface="Calibri"/>
               <a:spcAft>
                 <a:spcPts val="1000"/>
               </a:spcAft>
+              <a:buSzPct val="100000"/>
               <a:buChar char="•"/>
               <a:lnSpc>
                 <a:spcPts val="2200"/>
@@ -15211,10 +15425,12 @@
           </a:bodyPr>
           <a:lstStyle/>
           <a:p>
-            <a:pPr>
+            <a:pPr lvl="0" marL="457200" indent="-228600">
+              <a:buFont typeface="Calibri"/>
               <a:spcAft>
                 <a:spcPts val="1000"/>
               </a:spcAft>
+              <a:buSzPct val="100000"/>
               <a:buChar char="•"/>
               <a:lnSpc>
                 <a:spcPts val="2200"/>
@@ -15231,10 +15447,12 @@
             </a:r>
           </a:p>
           <a:p>
-            <a:pPr>
+            <a:pPr lvl="0" marL="457200" indent="-228600">
+              <a:buFont typeface="Calibri"/>
               <a:spcAft>
                 <a:spcPts val="1000"/>
               </a:spcAft>
+              <a:buSzPct val="100000"/>
               <a:buChar char="•"/>
               <a:lnSpc>
                 <a:spcPts val="2200"/>
@@ -15251,10 +15469,12 @@
             </a:r>
           </a:p>
           <a:p>
-            <a:pPr>
+            <a:pPr lvl="0" marL="457200" indent="-228600">
+              <a:buFont typeface="Calibri"/>
               <a:spcAft>
                 <a:spcPts val="1000"/>
               </a:spcAft>
+              <a:buSzPct val="100000"/>
               <a:buChar char="•"/>
               <a:lnSpc>
                 <a:spcPts val="2200"/>
@@ -15271,10 +15491,12 @@
             </a:r>
           </a:p>
           <a:p>
-            <a:pPr>
+            <a:pPr lvl="0" marL="457200" indent="-228600">
+              <a:buFont typeface="Calibri"/>
               <a:spcAft>
                 <a:spcPts val="1000"/>
               </a:spcAft>
+              <a:buSzPct val="100000"/>
               <a:buChar char="•"/>
               <a:lnSpc>
                 <a:spcPts val="2200"/>
@@ -15291,10 +15513,12 @@
             </a:r>
           </a:p>
           <a:p>
-            <a:pPr>
+            <a:pPr lvl="0" marL="457200" indent="-228600">
+              <a:buFont typeface="Calibri"/>
               <a:spcAft>
                 <a:spcPts val="1000"/>
               </a:spcAft>
+              <a:buSzPct val="100000"/>
               <a:buChar char="•"/>
               <a:lnSpc>
                 <a:spcPts val="2200"/>
@@ -15430,10 +15654,12 @@
           </a:bodyPr>
           <a:lstStyle/>
           <a:p>
-            <a:pPr>
+            <a:pPr lvl="0" marL="457200" indent="-228600">
+              <a:buFont typeface="Calibri"/>
               <a:spcAft>
                 <a:spcPts val="1000"/>
               </a:spcAft>
+              <a:buSzPct val="100000"/>
               <a:buChar char="•"/>
               <a:lnSpc>
                 <a:spcPts val="2200"/>
@@ -15450,10 +15676,12 @@
             </a:r>
           </a:p>
           <a:p>
-            <a:pPr>
+            <a:pPr lvl="0" marL="457200" indent="-228600">
+              <a:buFont typeface="Calibri"/>
               <a:spcAft>
                 <a:spcPts val="1000"/>
               </a:spcAft>
+              <a:buSzPct val="100000"/>
               <a:buChar char="•"/>
               <a:lnSpc>
                 <a:spcPts val="2200"/>
@@ -15589,10 +15817,12 @@
           </a:bodyPr>
           <a:lstStyle/>
           <a:p>
-            <a:pPr>
+            <a:pPr lvl="0" marL="457200" indent="-228600">
+              <a:buFont typeface="Calibri"/>
               <a:spcAft>
                 <a:spcPts val="1000"/>
               </a:spcAft>
+              <a:buSzPct val="100000"/>
               <a:buChar char="•"/>
               <a:lnSpc>
                 <a:spcPts val="2200"/>
@@ -15609,10 +15839,12 @@
             </a:r>
           </a:p>
           <a:p>
-            <a:pPr>
+            <a:pPr lvl="0" marL="457200" indent="-228600">
+              <a:buFont typeface="Calibri"/>
               <a:spcAft>
                 <a:spcPts val="1000"/>
               </a:spcAft>
+              <a:buSzPct val="100000"/>
               <a:buChar char="•"/>
               <a:lnSpc>
                 <a:spcPts val="2200"/>
@@ -15629,10 +15861,12 @@
             </a:r>
           </a:p>
           <a:p>
-            <a:pPr>
+            <a:pPr lvl="0" marL="457200" indent="-228600">
+              <a:buFont typeface="Calibri"/>
               <a:spcAft>
                 <a:spcPts val="1000"/>
               </a:spcAft>
+              <a:buSzPct val="100000"/>
               <a:buChar char="•"/>
               <a:lnSpc>
                 <a:spcPts val="2200"/>
@@ -15649,10 +15883,12 @@
             </a:r>
           </a:p>
           <a:p>
-            <a:pPr>
+            <a:pPr lvl="0" marL="457200" indent="-228600">
+              <a:buFont typeface="Calibri"/>
               <a:spcAft>
                 <a:spcPts val="1000"/>
               </a:spcAft>
+              <a:buSzPct val="100000"/>
               <a:buChar char="•"/>
               <a:lnSpc>
                 <a:spcPts val="2200"/>
@@ -15669,10 +15905,12 @@
             </a:r>
           </a:p>
           <a:p>
-            <a:pPr>
+            <a:pPr lvl="0" marL="457200" indent="-228600">
+              <a:buFont typeface="Calibri"/>
               <a:spcAft>
                 <a:spcPts val="1000"/>
               </a:spcAft>
+              <a:buSzPct val="100000"/>
               <a:buChar char="•"/>
               <a:lnSpc>
                 <a:spcPts val="2200"/>
@@ -15808,10 +16046,12 @@
           </a:bodyPr>
           <a:lstStyle/>
           <a:p>
-            <a:pPr>
+            <a:pPr lvl="0" marL="457200" indent="-228600">
+              <a:buFont typeface="Calibri"/>
               <a:spcAft>
                 <a:spcPts val="1000"/>
               </a:spcAft>
+              <a:buSzPct val="100000"/>
               <a:buChar char="•"/>
               <a:lnSpc>
                 <a:spcPts val="2200"/>
@@ -15828,10 +16068,12 @@
             </a:r>
           </a:p>
           <a:p>
-            <a:pPr>
+            <a:pPr lvl="0" marL="457200" indent="-228600">
+              <a:buFont typeface="Calibri"/>
               <a:spcAft>
                 <a:spcPts val="1000"/>
               </a:spcAft>
+              <a:buSzPct val="100000"/>
               <a:buChar char="•"/>
               <a:lnSpc>
                 <a:spcPts val="2200"/>
@@ -15848,10 +16090,12 @@
             </a:r>
           </a:p>
           <a:p>
-            <a:pPr>
+            <a:pPr lvl="0" marL="457200" indent="-228600">
+              <a:buFont typeface="Calibri"/>
               <a:spcAft>
                 <a:spcPts val="1000"/>
               </a:spcAft>
+              <a:buSzPct val="100000"/>
               <a:buChar char="•"/>
               <a:lnSpc>
                 <a:spcPts val="2200"/>
@@ -15868,10 +16112,12 @@
             </a:r>
           </a:p>
           <a:p>
-            <a:pPr>
+            <a:pPr lvl="0" marL="457200" indent="-228600">
+              <a:buFont typeface="Calibri"/>
               <a:spcAft>
                 <a:spcPts val="1000"/>
               </a:spcAft>
+              <a:buSzPct val="100000"/>
               <a:buChar char="•"/>
               <a:lnSpc>
                 <a:spcPts val="2200"/>
@@ -15888,10 +16134,12 @@
             </a:r>
           </a:p>
           <a:p>
-            <a:pPr>
+            <a:pPr lvl="0" marL="457200" indent="-228600">
+              <a:buFont typeface="Calibri"/>
               <a:spcAft>
                 <a:spcPts val="1000"/>
               </a:spcAft>
+              <a:buSzPct val="100000"/>
               <a:buChar char="•"/>
               <a:lnSpc>
                 <a:spcPts val="2200"/>
@@ -16490,10 +16738,12 @@
           </a:bodyPr>
           <a:lstStyle/>
           <a:p>
-            <a:pPr>
+            <a:pPr lvl="0" marL="457200" indent="-228600">
+              <a:buFont typeface="Calibri"/>
               <a:spcAft>
                 <a:spcPts val="1000"/>
               </a:spcAft>
+              <a:buSzPct val="100000"/>
               <a:buChar char="•"/>
               <a:lnSpc>
                 <a:spcPts val="2200"/>
@@ -16510,10 +16760,12 @@
             </a:r>
           </a:p>
           <a:p>
-            <a:pPr>
+            <a:pPr lvl="0" marL="457200" indent="-228600">
+              <a:buFont typeface="Calibri"/>
               <a:spcAft>
                 <a:spcPts val="1000"/>
               </a:spcAft>
+              <a:buSzPct val="100000"/>
               <a:buChar char="•"/>
               <a:lnSpc>
                 <a:spcPts val="2200"/>
@@ -16530,10 +16782,12 @@
             </a:r>
           </a:p>
           <a:p>
-            <a:pPr>
+            <a:pPr lvl="0" marL="457200" indent="-228600">
+              <a:buFont typeface="Calibri"/>
               <a:spcAft>
                 <a:spcPts val="1000"/>
               </a:spcAft>
+              <a:buSzPct val="100000"/>
               <a:buChar char="•"/>
               <a:lnSpc>
                 <a:spcPts val="2200"/>
@@ -16669,10 +16923,12 @@
           </a:bodyPr>
           <a:lstStyle/>
           <a:p>
-            <a:pPr>
+            <a:pPr lvl="0" marL="457200" indent="-228600">
+              <a:buFont typeface="Calibri"/>
               <a:spcAft>
                 <a:spcPts val="1000"/>
               </a:spcAft>
+              <a:buSzPct val="100000"/>
               <a:buChar char="•"/>
               <a:lnSpc>
                 <a:spcPts val="2200"/>
@@ -16689,10 +16945,12 @@
             </a:r>
           </a:p>
           <a:p>
-            <a:pPr>
+            <a:pPr lvl="0" marL="457200" indent="-228600">
+              <a:buFont typeface="Calibri"/>
               <a:spcAft>
                 <a:spcPts val="1000"/>
               </a:spcAft>
+              <a:buSzPct val="100000"/>
               <a:buChar char="•"/>
               <a:lnSpc>
                 <a:spcPts val="2200"/>
@@ -16828,10 +17086,12 @@
           </a:bodyPr>
           <a:lstStyle/>
           <a:p>
-            <a:pPr>
+            <a:pPr lvl="0" marL="457200" indent="-228600">
+              <a:buFont typeface="Calibri"/>
               <a:spcAft>
                 <a:spcPts val="1000"/>
               </a:spcAft>
+              <a:buSzPct val="100000"/>
               <a:buChar char="•"/>
               <a:lnSpc>
                 <a:spcPts val="2200"/>
@@ -16848,10 +17108,12 @@
             </a:r>
           </a:p>
           <a:p>
-            <a:pPr>
+            <a:pPr lvl="0" marL="457200" indent="-228600">
+              <a:buFont typeface="Calibri"/>
               <a:spcAft>
                 <a:spcPts val="1000"/>
               </a:spcAft>
+              <a:buSzPct val="100000"/>
               <a:buChar char="•"/>
               <a:lnSpc>
                 <a:spcPts val="2200"/>
@@ -16987,10 +17249,12 @@
           </a:bodyPr>
           <a:lstStyle/>
           <a:p>
-            <a:pPr>
+            <a:pPr lvl="0" marL="457200" indent="-228600">
+              <a:buFont typeface="Calibri"/>
               <a:spcAft>
                 <a:spcPts val="1000"/>
               </a:spcAft>
+              <a:buSzPct val="100000"/>
               <a:buChar char="•"/>
               <a:lnSpc>
                 <a:spcPts val="2200"/>
@@ -17007,10 +17271,12 @@
             </a:r>
           </a:p>
           <a:p>
-            <a:pPr>
+            <a:pPr lvl="0" marL="457200" indent="-228600">
+              <a:buFont typeface="Calibri"/>
               <a:spcAft>
                 <a:spcPts val="1000"/>
               </a:spcAft>
+              <a:buSzPct val="100000"/>
               <a:buChar char="•"/>
               <a:lnSpc>
                 <a:spcPts val="2200"/>
@@ -17027,10 +17293,12 @@
             </a:r>
           </a:p>
           <a:p>
-            <a:pPr>
+            <a:pPr lvl="0" marL="457200" indent="-228600">
+              <a:buFont typeface="Calibri"/>
               <a:spcAft>
                 <a:spcPts val="1000"/>
               </a:spcAft>
+              <a:buSzPct val="100000"/>
               <a:buChar char="•"/>
               <a:lnSpc>
                 <a:spcPts val="2200"/>
@@ -17166,10 +17434,12 @@
           </a:bodyPr>
           <a:lstStyle/>
           <a:p>
-            <a:pPr>
+            <a:pPr lvl="0" marL="457200" indent="-228600">
+              <a:buFont typeface="Calibri"/>
               <a:spcAft>
                 <a:spcPts val="1000"/>
               </a:spcAft>
+              <a:buSzPct val="100000"/>
               <a:buChar char="•"/>
               <a:lnSpc>
                 <a:spcPts val="2200"/>
@@ -17186,10 +17456,12 @@
             </a:r>
           </a:p>
           <a:p>
-            <a:pPr>
+            <a:pPr lvl="0" marL="457200" indent="-228600">
+              <a:buFont typeface="Calibri"/>
               <a:spcAft>
                 <a:spcPts val="1000"/>
               </a:spcAft>
+              <a:buSzPct val="100000"/>
               <a:buChar char="•"/>
               <a:lnSpc>
                 <a:spcPts val="2200"/>
@@ -17325,10 +17597,12 @@
           </a:bodyPr>
           <a:lstStyle/>
           <a:p>
-            <a:pPr>
+            <a:pPr lvl="0" marL="457200" indent="-228600">
+              <a:buFont typeface="Calibri"/>
               <a:spcAft>
                 <a:spcPts val="1000"/>
               </a:spcAft>
+              <a:buSzPct val="100000"/>
               <a:buChar char="•"/>
               <a:lnSpc>
                 <a:spcPts val="2200"/>
@@ -17345,10 +17619,12 @@
             </a:r>
           </a:p>
           <a:p>
-            <a:pPr>
+            <a:pPr lvl="0" marL="457200" indent="-228600">
+              <a:buFont typeface="Calibri"/>
               <a:spcAft>
                 <a:spcPts val="1000"/>
               </a:spcAft>
+              <a:buSzPct val="100000"/>
               <a:buChar char="•"/>
               <a:lnSpc>
                 <a:spcPts val="2200"/>
@@ -17365,10 +17641,12 @@
             </a:r>
           </a:p>
           <a:p>
-            <a:pPr>
+            <a:pPr lvl="0" marL="457200" indent="-228600">
+              <a:buFont typeface="Calibri"/>
               <a:spcAft>
                 <a:spcPts val="1000"/>
               </a:spcAft>
+              <a:buSzPct val="100000"/>
               <a:buChar char="•"/>
               <a:lnSpc>
                 <a:spcPts val="2200"/>
@@ -17504,10 +17782,12 @@
           </a:bodyPr>
           <a:lstStyle/>
           <a:p>
-            <a:pPr>
+            <a:pPr lvl="0" marL="457200" indent="-228600">
+              <a:buFont typeface="Calibri"/>
               <a:spcAft>
                 <a:spcPts val="1000"/>
               </a:spcAft>
+              <a:buSzPct val="100000"/>
               <a:buChar char="•"/>
               <a:lnSpc>
                 <a:spcPts val="2200"/>
@@ -17524,10 +17804,12 @@
             </a:r>
           </a:p>
           <a:p>
-            <a:pPr>
+            <a:pPr lvl="0" marL="457200" indent="-228600">
+              <a:buFont typeface="Calibri"/>
               <a:spcAft>
                 <a:spcPts val="1000"/>
               </a:spcAft>
+              <a:buSzPct val="100000"/>
               <a:buChar char="•"/>
               <a:lnSpc>
                 <a:spcPts val="2200"/>
@@ -17663,10 +17945,12 @@
           </a:bodyPr>
           <a:lstStyle/>
           <a:p>
-            <a:pPr>
+            <a:pPr lvl="0" marL="457200" indent="-228600">
+              <a:buFont typeface="Calibri"/>
               <a:spcAft>
                 <a:spcPts val="1000"/>
               </a:spcAft>
+              <a:buSzPct val="100000"/>
               <a:buChar char="•"/>
               <a:lnSpc>
                 <a:spcPts val="2200"/>
@@ -17683,10 +17967,12 @@
             </a:r>
           </a:p>
           <a:p>
-            <a:pPr>
+            <a:pPr lvl="0" marL="457200" indent="-228600">
+              <a:buFont typeface="Calibri"/>
               <a:spcAft>
                 <a:spcPts val="1000"/>
               </a:spcAft>
+              <a:buSzPct val="100000"/>
               <a:buChar char="•"/>
               <a:lnSpc>
                 <a:spcPts val="2200"/>
@@ -17703,10 +17989,12 @@
             </a:r>
           </a:p>
           <a:p>
-            <a:pPr>
+            <a:pPr lvl="0" marL="457200" indent="-228600">
+              <a:buFont typeface="Calibri"/>
               <a:spcAft>
                 <a:spcPts val="1000"/>
               </a:spcAft>
+              <a:buSzPct val="100000"/>
               <a:buChar char="•"/>
               <a:lnSpc>
                 <a:spcPts val="2200"/>
@@ -17842,10 +18130,12 @@
           </a:bodyPr>
           <a:lstStyle/>
           <a:p>
-            <a:pPr>
+            <a:pPr lvl="0" marL="457200" indent="-228600">
+              <a:buFont typeface="Calibri"/>
               <a:spcAft>
                 <a:spcPts val="1000"/>
               </a:spcAft>
+              <a:buSzPct val="100000"/>
               <a:buChar char="•"/>
               <a:lnSpc>
                 <a:spcPts val="2200"/>
@@ -17862,10 +18152,12 @@
             </a:r>
           </a:p>
           <a:p>
-            <a:pPr>
+            <a:pPr lvl="0" marL="457200" indent="-228600">
+              <a:buFont typeface="Calibri"/>
               <a:spcAft>
                 <a:spcPts val="1000"/>
               </a:spcAft>
+              <a:buSzPct val="100000"/>
               <a:buChar char="•"/>
               <a:lnSpc>
                 <a:spcPts val="2200"/>
@@ -18255,10 +18547,12 @@
           </a:bodyPr>
           <a:lstStyle/>
           <a:p>
-            <a:pPr>
+            <a:pPr lvl="0" marL="457200" indent="-228600">
+              <a:buFont typeface="Calibri"/>
               <a:spcAft>
                 <a:spcPts val="1000"/>
               </a:spcAft>
+              <a:buSzPct val="100000"/>
               <a:buChar char="•"/>
               <a:lnSpc>
                 <a:spcPts val="2200"/>
@@ -18275,10 +18569,12 @@
             </a:r>
           </a:p>
           <a:p>
-            <a:pPr>
+            <a:pPr lvl="0" marL="457200" indent="-228600">
+              <a:buFont typeface="Calibri"/>
               <a:spcAft>
                 <a:spcPts val="1000"/>
               </a:spcAft>
+              <a:buSzPct val="100000"/>
               <a:buChar char="•"/>
               <a:lnSpc>
                 <a:spcPts val="2200"/>
@@ -18295,10 +18591,12 @@
             </a:r>
           </a:p>
           <a:p>
-            <a:pPr>
+            <a:pPr lvl="0" marL="457200" indent="-228600">
+              <a:buFont typeface="Calibri"/>
               <a:spcAft>
                 <a:spcPts val="1000"/>
               </a:spcAft>
+              <a:buSzPct val="100000"/>
               <a:buChar char="•"/>
               <a:lnSpc>
                 <a:spcPts val="2200"/>
@@ -18315,10 +18613,12 @@
             </a:r>
           </a:p>
           <a:p>
-            <a:pPr>
+            <a:pPr lvl="0" marL="457200" indent="-228600">
+              <a:buFont typeface="Calibri"/>
               <a:spcAft>
                 <a:spcPts val="1000"/>
               </a:spcAft>
+              <a:buSzPct val="100000"/>
               <a:buChar char="•"/>
               <a:lnSpc>
                 <a:spcPts val="2200"/>
@@ -18335,10 +18635,12 @@
             </a:r>
           </a:p>
           <a:p>
-            <a:pPr>
+            <a:pPr lvl="0" marL="457200" indent="-228600">
+              <a:buFont typeface="Calibri"/>
               <a:spcAft>
                 <a:spcPts val="1000"/>
               </a:spcAft>
+              <a:buSzPct val="100000"/>
               <a:buChar char="•"/>
               <a:lnSpc>
                 <a:spcPts val="2200"/>
@@ -18918,10 +19220,12 @@
           </a:bodyPr>
           <a:lstStyle/>
           <a:p>
-            <a:pPr>
+            <a:pPr lvl="0" marL="457200" indent="-228600">
+              <a:buFont typeface="Calibri"/>
               <a:spcAft>
                 <a:spcPts val="1000"/>
               </a:spcAft>
+              <a:buSzPct val="100000"/>
               <a:buChar char="•"/>
               <a:lnSpc>
                 <a:spcPts val="2200"/>
@@ -18938,10 +19242,12 @@
             </a:r>
           </a:p>
           <a:p>
-            <a:pPr>
+            <a:pPr lvl="0" marL="457200" indent="-228600">
+              <a:buFont typeface="Calibri"/>
               <a:spcAft>
                 <a:spcPts val="1000"/>
               </a:spcAft>
+              <a:buSzPct val="100000"/>
               <a:buChar char="•"/>
               <a:lnSpc>
                 <a:spcPts val="2200"/>
@@ -18958,10 +19264,12 @@
             </a:r>
           </a:p>
           <a:p>
-            <a:pPr>
+            <a:pPr lvl="0" marL="457200" indent="-228600">
+              <a:buFont typeface="Calibri"/>
               <a:spcAft>
                 <a:spcPts val="1000"/>
               </a:spcAft>
+              <a:buSzPct val="100000"/>
               <a:buChar char="•"/>
               <a:lnSpc>
                 <a:spcPts val="2200"/>
